--- a/decks/hist-vikings-saxons/hist-vikings-saxons_ch2_sources.pptx
+++ b/decks/hist-vikings-saxons/hist-vikings-saxons_ch2_sources.pptx
@@ -126,30 +126,30 @@
   <p:extLst>
     <p:ext uri="{521415D9-36F7-43E2-AB2F-B90AF26B5E84}">
       <p14:sectionLst xmlns:p14="http://schemas.microsoft.com/office/powerpoint/2010/main">
-        <p14:section name="Opening" id="{3e990713-ba82-0659-4dfe-94a951b7aefd}">
+        <p14:section name="Opening" id="{8c8266d8-7a65-6070-5d1c-59524ade4604}">
           <p14:sldIdLst>
             <p14:sldId id="256"/>
           </p14:sldIdLst>
         </p14:section>
-        <p14:section name="Gate" id="{cae82328-781b-2be7-96f5-f1c18c140ae7}">
+        <p14:section name="Gate" id="{54af6c51-e770-79e1-8731-0e2b141a935c}">
           <p14:sldIdLst>
             <p14:sldId id="257"/>
             <p14:sldId id="258"/>
             <p14:sldId id="259"/>
           </p14:sldIdLst>
         </p14:section>
-        <p14:section name="Pre-teach" id="{3cc4b21c-ce01-574d-67b7-709ff970f13b}">
+        <p14:section name="Pre-teach" id="{e3de05c2-911a-ba6d-48c8-dda970c7591c}">
           <p14:sldIdLst>
             <p14:sldId id="260"/>
             <p14:sldId id="261"/>
           </p14:sldIdLst>
         </p14:section>
-        <p14:section name="Read-along" id="{b971e0c2-4e14-4cd6-6ae2-c9c80168d366}">
+        <p14:section name="Read-along" id="{a049cdb3-6b1e-e40c-8693-667f64f5087c}">
           <p14:sldIdLst>
             <p14:sldId id="262"/>
           </p14:sldIdLst>
         </p14:section>
-        <p14:section name="Teach" id="{5a41bee1-9a78-c20e-ce2e-4c0c409052dd}">
+        <p14:section name="Teach" id="{63186003-01dc-60d8-5d09-6dc76cbf1ebe}">
           <p14:sldIdLst>
             <p14:sldId id="263"/>
             <p14:sldId id="264"/>
@@ -158,7 +158,7 @@
             <p14:sldId id="267"/>
           </p14:sldIdLst>
         </p14:section>
-        <p14:section name="Routes" id="{69029f92-ae4c-3877-4f71-79db9e9d06a3}">
+        <p14:section name="Routes" id="{790484a6-fc25-0d91-1e13-8bbbc95ede87}">
           <p14:sldIdLst>
             <p14:sldId id="268"/>
             <p14:sldId id="269"/>
@@ -166,12 +166,12 @@
             <p14:sldId id="271"/>
           </p14:sldIdLst>
         </p14:section>
-        <p14:section name="Close" id="{dbbb872d-cbdf-9de5-57b3-33387d9fed60}">
+        <p14:section name="Close" id="{56c1e5be-dc5f-bb56-76cd-7358b6509578}">
           <p14:sldIdLst>
             <p14:sldId id="272"/>
           </p14:sldIdLst>
         </p14:section>
-        <p14:section name="Answers" id="{b453a7f9-b13d-2949-741c-2e68b40a8703}">
+        <p14:section name="Answers" id="{d9f0ca97-2c17-7be9-bd06-fa6fa10ca1f5}">
           <p14:sldIdLst>
             <p14:sldId id="273"/>
             <p14:sldId id="274"/>
